--- a/docs/Plan A_説明会スライド_第1期_20261002.pptx
+++ b/docs/Plan A_説明会スライド_第1期_20261002.pptx
@@ -3778,7 +3778,7 @@
                   <a:schemeClr val="tx1"/>
                 </a:solidFill>
               </a:rPr>
-              <a:t>初期1万円(税込表記</a:t>
+              <a:t>初期1万円(税込・1回きり</a:t>
             </a:r>
             <a:pPr indent="0" marL="0">
               <a:buNone/>
@@ -3789,7 +3789,7 @@
                   <a:schemeClr val="accent2"/>
                 </a:solidFill>
               </a:rPr>
-              <a:t>【要確認】</a:t>
+              <a:t/>
             </a:r>
             <a:pPr indent="0" marL="0">
               <a:buNone/>
@@ -3800,7 +3800,7 @@
                   <a:schemeClr val="tx1"/>
                 </a:solidFill>
               </a:rPr>
-              <a:t>)+成約売上の3%</a:t>
+              <a:t>）+成約売上の3%</a:t>
             </a:r>
             <a:endParaRPr lang="en-US" sz="1600" dirty="0"/>
           </a:p>
@@ -4027,7 +4027,7 @@
                   <a:schemeClr val="tx1"/>
                 </a:solidFill>
               </a:rPr>
-              <a:t>いつでも掲載を止められます。初期費用の返金条件: </a:t>
+              <a:t>いつでも掲載を止められます。初期費用の返金はありません。掲載から6か月、買い手からの問い合わせがなければ商品ページを無料で作り直して掲載を続けます</a:t>
             </a:r>
             <a:pPr indent="0" marL="0">
               <a:buNone/>
@@ -4038,7 +4038,7 @@
                   <a:schemeClr val="accent2"/>
                 </a:solidFill>
               </a:rPr>
-              <a:t>【要決裁】</a:t>
+              <a:t/>
             </a:r>
             <a:endParaRPr lang="en-US" sz="1600" dirty="0"/>
           </a:p>
@@ -5584,7 +5584,7 @@
                   <a:schemeClr val="tx1"/>
                 </a:solidFill>
               </a:rPr>
-              <a:t>3%の費用はかかりません。掲載の継続・停止はいつでも選べます。初期費用の返金条件は </a:t>
+              <a:t>3%の費用はかかりません。掲載の継続・停止はいつでも選べます。初期費用の返金はありません。掲載から6か月、買い手からの問い合わせがなければ商品ページを無料で作り直して掲載を続けます</a:t>
             </a:r>
             <a:pPr indent="0" marL="0">
               <a:buNone/>
@@ -5595,7 +5595,7 @@
                   <a:schemeClr val="accent2"/>
                 </a:solidFill>
               </a:rPr>
-              <a:t>【要決裁】</a:t>
+              <a:t/>
             </a:r>
             <a:pPr indent="0" marL="0">
               <a:buNone/>
@@ -5606,7 +5606,7 @@
                   <a:schemeClr val="tx1"/>
                 </a:solidFill>
               </a:rPr>
-              <a:t>。</a:t>
+              <a:t/>
             </a:r>
             <a:endParaRPr lang="en-US" sz="1300" dirty="0"/>
           </a:p>
@@ -9171,7 +9171,7 @@
                   <a:schemeClr val="tx1"/>
                 </a:solidFill>
               </a:rPr>
-              <a:t>税込表記</a:t>
+              <a:t>税込・1回きり</a:t>
             </a:r>
             <a:pPr indent="0" marL="0">
               <a:buNone/>
@@ -9182,7 +9182,7 @@
                   <a:schemeClr val="accent2"/>
                 </a:solidFill>
               </a:rPr>
-              <a:t>【要確認】</a:t>
+              <a:t/>
             </a:r>
             <a:endParaRPr lang="en-US" sz="1200" dirty="0"/>
           </a:p>
@@ -9587,7 +9587,7 @@
                   <a:schemeClr val="tx1"/>
                 </a:solidFill>
               </a:rPr>
-              <a:t>上限100米ドル。負担者: </a:t>
+              <a:t>上限100米ドル。海外向けの価格に含めて見積りに明記</a:t>
             </a:r>
             <a:pPr indent="0" marL="0">
               <a:buNone/>
@@ -9598,7 +9598,7 @@
                   <a:schemeClr val="accent2"/>
                 </a:solidFill>
               </a:rPr>
-              <a:t>【要決裁】</a:t>
+              <a:t/>
             </a:r>
             <a:endParaRPr lang="en-US" sz="1200" dirty="0"/>
           </a:p>
